--- a/slides/section_02.pptx
+++ b/slides/section_02.pptx
@@ -4173,8 +4173,8 @@
         </p:nvSpPr>
         <p:spPr>
           <a:xfrm>
-            <a:off x="4572000" y="2194560"/>
-            <a:ext cx="-2331720" cy="0"/>
+            <a:off x="2240280" y="2194560"/>
+            <a:ext cx="2331720" cy="0"/>
           </a:xfrm>
           <a:prstGeom prst="line">
             <a:avLst/>
@@ -4313,8 +4313,8 @@
         </p:nvSpPr>
         <p:spPr>
           <a:xfrm>
-            <a:off x="4572000" y="2194560"/>
-            <a:ext cx="-777240" cy="0"/>
+            <a:off x="3794760" y="2194560"/>
+            <a:ext cx="777240" cy="0"/>
           </a:xfrm>
           <a:prstGeom prst="line">
             <a:avLst/>
